--- a/stage2_intermediate/02_random_forests/Lecture-7-Random-Forests.pptx
+++ b/stage2_intermediate/02_random_forests/Lecture-7-Random-Forests.pptx
@@ -8310,6 +8310,9 @@
           <a:lstStyle/>
           <a:p>
             <a:r>
+              <a:rPr>
+                <a:latin typeface="Calibri"/>
+              </a:rPr>
               <a:t>AI Basic Training</a:t>
             </a:r>
           </a:p>
@@ -8331,6 +8334,9 @@
           <a:lstStyle/>
           <a:p>
             <a:r>
+              <a:rPr>
+                <a:latin typeface="Calibri"/>
+              </a:rPr>
               <a:t>Lesson 2.2  |  Stage 2: Intermediate ML</a:t>
             </a:r>
           </a:p>
@@ -8352,6 +8358,9 @@
           <a:lstStyle/>
           <a:p>
             <a:r>
+              <a:rPr b="1">
+                <a:latin typeface="Calibri"/>
+              </a:rPr>
               <a:t>Random Forests</a:t>
             </a:r>
           </a:p>
@@ -8373,6 +8382,9 @@
           <a:lstStyle/>
           <a:p>
             <a:r>
+              <a:rPr>
+                <a:latin typeface="Calibri"/>
+              </a:rPr>
               <a:t>Wisdom of the Crowd  -  Ensemble Learning for Malware Detection</a:t>
             </a:r>
           </a:p>
@@ -8412,6 +8424,9 @@
           <a:lstStyle/>
           <a:p>
             <a:r>
+              <a:rPr b="1">
+                <a:latin typeface="Calibri"/>
+              </a:rPr>
               <a:t>The Code - Training a Random Forest</a:t>
             </a:r>
           </a:p>
@@ -8433,67 +8448,89 @@
           <a:lstStyle/>
           <a:p>
             <a:r>
-              <a:rPr sz="1500"/>
+              <a:rPr sz="1500">
+                <a:latin typeface="Calibri"/>
+              </a:rPr>
               <a:t>from sklearn.ensemble import RandomForestClassifier</a:t>
             </a:r>
           </a:p>
           <a:p>
             <a:r>
-              <a:rPr sz="1500"/>
+              <a:rPr sz="1500">
+                <a:latin typeface="Calibri"/>
+              </a:rPr>
               <a:t/>
             </a:r>
           </a:p>
           <a:p>
             <a:r>
-              <a:rPr sz="1500"/>
+              <a:rPr sz="1500">
+                <a:latin typeface="Calibri"/>
+              </a:rPr>
               <a:t>model = RandomForestClassifier(</a:t>
             </a:r>
           </a:p>
           <a:p>
             <a:r>
-              <a:rPr sz="1500"/>
+              <a:rPr sz="1500">
+                <a:latin typeface="Calibri"/>
+              </a:rPr>
               <a:t>    n_estimators=200,     # 200 trees</a:t>
             </a:r>
           </a:p>
           <a:p>
             <a:r>
-              <a:rPr sz="1500"/>
+              <a:rPr sz="1500">
+                <a:latin typeface="Calibri"/>
+              </a:rPr>
               <a:t>    max_depth=None,       # let trees grow fully</a:t>
             </a:r>
           </a:p>
           <a:p>
             <a:r>
-              <a:rPr sz="1500"/>
+              <a:rPr sz="1500">
+                <a:latin typeface="Calibri"/>
+              </a:rPr>
               <a:t>    oob_score=True,       # free validation estimate</a:t>
             </a:r>
           </a:p>
           <a:p>
             <a:r>
-              <a:rPr sz="1500"/>
+              <a:rPr sz="1500">
+                <a:latin typeface="Calibri"/>
+              </a:rPr>
               <a:t>    n_jobs=-1,            # use all CPU cores</a:t>
             </a:r>
           </a:p>
           <a:p>
             <a:r>
-              <a:rPr sz="1500"/>
+              <a:rPr sz="1500">
+                <a:latin typeface="Calibri"/>
+              </a:rPr>
               <a:t>    random_state=42</a:t>
             </a:r>
           </a:p>
           <a:p>
             <a:r>
-              <a:rPr sz="1500"/>
+              <a:rPr sz="1500">
+                <a:latin typeface="Calibri"/>
+              </a:rPr>
               <a:t>)</a:t>
             </a:r>
           </a:p>
           <a:p>
             <a:r>
-              <a:rPr sz="1500"/>
+              <a:rPr sz="1500">
+                <a:latin typeface="Calibri"/>
+              </a:rPr>
               <a:t>model.fit(X_train, y_train)</a:t>
             </a:r>
           </a:p>
           <a:p>
             <a:r>
-              <a:rPr sz="1500"/>
+              <a:rPr sz="1500">
+                <a:latin typeface="Calibri"/>
+              </a:rPr>
               <a:t>print(f'OOB accuracy: {model.oob_score_:.4f}')</a:t>
             </a:r>
           </a:p>
@@ -8533,11 +8570,17 @@
           <a:lstStyle/>
           <a:p>
             <a:r>
+              <a:rPr b="1">
+                <a:latin typeface="Calibri"/>
+              </a:rPr>
               <a:t>OOB Error and</a:t>
             </a:r>
           </a:p>
           <a:p>
             <a:r>
+              <a:rPr b="1">
+                <a:latin typeface="Calibri"/>
+              </a:rPr>
               <a:t>Tuning the Forest</a:t>
             </a:r>
           </a:p>
@@ -8559,6 +8602,9 @@
           <a:lstStyle/>
           <a:p>
             <a:r>
+              <a:rPr b="1">
+                <a:latin typeface="Calibri"/>
+              </a:rPr>
               <a:t>04</a:t>
             </a:r>
           </a:p>
@@ -8598,6 +8644,9 @@
           <a:lstStyle/>
           <a:p>
             <a:r>
+              <a:rPr b="1">
+                <a:latin typeface="Calibri"/>
+              </a:rPr>
               <a:t>Out-of-Bag: Free Validation from Bootstrap Sampling</a:t>
             </a:r>
           </a:p>
@@ -8661,6 +8710,9 @@
           <a:lstStyle/>
           <a:p>
             <a:r>
+              <a:rPr b="1">
+                <a:latin typeface="Calibri"/>
+              </a:rPr>
               <a:t>Learning Curve: More Trees Help, But Returns Diminish</a:t>
             </a:r>
           </a:p>
@@ -8724,11 +8776,17 @@
           <a:lstStyle/>
           <a:p>
             <a:r>
+              <a:rPr b="1">
+                <a:latin typeface="Calibri"/>
+              </a:rPr>
               <a:t>Workshop</a:t>
             </a:r>
           </a:p>
           <a:p>
             <a:r>
+              <a:rPr b="1">
+                <a:latin typeface="Calibri"/>
+              </a:rPr>
               <a:t>and Next Steps</a:t>
             </a:r>
           </a:p>
@@ -8750,6 +8808,9 @@
           <a:lstStyle/>
           <a:p>
             <a:r>
+              <a:rPr b="1">
+                <a:latin typeface="Calibri"/>
+              </a:rPr>
               <a:t>05</a:t>
             </a:r>
           </a:p>
@@ -8789,6 +8850,9 @@
           <a:lstStyle/>
           <a:p>
             <a:r>
+              <a:rPr b="1">
+                <a:latin typeface="Calibri"/>
+              </a:rPr>
               <a:t>Workshop: 4 Hands-On Exercises</a:t>
             </a:r>
           </a:p>
@@ -8810,37 +8874,49 @@
           <a:lstStyle/>
           <a:p>
             <a:r>
-              <a:rPr sz="1600"/>
+              <a:rPr sz="1600">
+                <a:latin typeface="Calibri"/>
+              </a:rPr>
               <a:t>Exercise 1:  Single tree overfitting demo vs forest stability</a:t>
             </a:r>
           </a:p>
           <a:p>
             <a:r>
-              <a:rPr sz="1600"/>
+              <a:rPr sz="1600">
+                <a:latin typeface="Calibri"/>
+              </a:rPr>
               <a:t>Exercise 2:  Train a Random Forest - OOB score, tree vs forest accuracy</a:t>
             </a:r>
           </a:p>
           <a:p>
             <a:r>
-              <a:rPr sz="1600"/>
+              <a:rPr sz="1600">
+                <a:latin typeface="Calibri"/>
+              </a:rPr>
               <a:t>Exercise 3:  Feature importance - stable vs noisy (single tree vs forest)</a:t>
             </a:r>
           </a:p>
           <a:p>
             <a:r>
-              <a:rPr sz="1600"/>
+              <a:rPr sz="1600">
+                <a:latin typeface="Calibri"/>
+              </a:rPr>
               <a:t>Exercise 4:  Tune the forest - n_estimators sweep, max_features, learning curve</a:t>
             </a:r>
           </a:p>
           <a:p>
             <a:r>
-              <a:rPr sz="1600"/>
+              <a:rPr sz="1600">
+                <a:latin typeface="Calibri"/>
+              </a:rPr>
               <a:t/>
             </a:r>
           </a:p>
           <a:p>
             <a:r>
-              <a:rPr sz="1600"/>
+              <a:rPr sz="1600">
+                <a:latin typeface="Calibri"/>
+              </a:rPr>
               <a:t>Each exercise: lecture.md + handson.md + solution file</a:t>
             </a:r>
           </a:p>
@@ -8880,37 +8956,49 @@
           <a:lstStyle/>
           <a:p>
             <a:r>
-              <a:rPr sz="1500"/>
+              <a:rPr sz="1500">
+                <a:latin typeface="Calibri"/>
+              </a:rPr>
               <a:t>Random Forest = many diverse trees voting together</a:t>
             </a:r>
           </a:p>
           <a:p>
             <a:r>
-              <a:rPr sz="1500"/>
+              <a:rPr sz="1500">
+                <a:latin typeface="Calibri"/>
+              </a:rPr>
               <a:t>Bootstrap sampling + random features = diversity that reduces overfitting</a:t>
             </a:r>
           </a:p>
           <a:p>
             <a:r>
-              <a:rPr sz="1500"/>
+              <a:rPr sz="1500">
+                <a:latin typeface="Calibri"/>
+              </a:rPr>
               <a:t>OOB score gives free validation - no separate test set needed during training</a:t>
             </a:r>
           </a:p>
           <a:p>
             <a:r>
-              <a:rPr sz="1500"/>
+              <a:rPr sz="1500">
+                <a:latin typeface="Calibri"/>
+              </a:rPr>
               <a:t>Feature importance is more stable than a single tree</a:t>
             </a:r>
           </a:p>
           <a:p>
             <a:r>
-              <a:rPr sz="1500"/>
+              <a:rPr sz="1500">
+                <a:latin typeface="Calibri"/>
+              </a:rPr>
               <a:t>100-300 trees is usually sufficient - diminishing returns beyond that</a:t>
             </a:r>
           </a:p>
           <a:p>
             <a:r>
-              <a:rPr sz="1500"/>
+              <a:rPr sz="1500">
+                <a:latin typeface="Calibri"/>
+              </a:rPr>
               <a:t>Next: Clustering - detect anomalies without any labels at all</a:t>
             </a:r>
           </a:p>
@@ -8932,11 +9020,17 @@
           <a:lstStyle/>
           <a:p>
             <a:r>
+              <a:rPr b="1">
+                <a:latin typeface="Calibri"/>
+              </a:rPr>
               <a:t>Key</a:t>
             </a:r>
           </a:p>
           <a:p>
             <a:r>
+              <a:rPr b="1">
+                <a:latin typeface="Calibri"/>
+              </a:rPr>
               <a:t>Takeaways</a:t>
             </a:r>
           </a:p>
@@ -8976,6 +9070,9 @@
           <a:lstStyle/>
           <a:p>
             <a:r>
+              <a:rPr>
+                <a:latin typeface="Calibri"/>
+              </a:rPr>
               <a:t>Next:  Lesson 2.3 - Clustering and Anomaly Detection</a:t>
             </a:r>
           </a:p>
@@ -8997,6 +9094,9 @@
           <a:lstStyle/>
           <a:p>
             <a:r>
+              <a:rPr b="1">
+                <a:latin typeface="Calibri"/>
+              </a:rPr>
               <a:t>Random Forests</a:t>
             </a:r>
           </a:p>
@@ -9036,31 +9136,41 @@
           <a:lstStyle/>
           <a:p>
             <a:r>
-              <a:rPr sz="1600"/>
+              <a:rPr sz="1600">
+                <a:latin typeface="Calibri"/>
+              </a:rPr>
               <a:t>From one tree to many - the ensemble concept</a:t>
             </a:r>
           </a:p>
           <a:p>
             <a:r>
-              <a:rPr sz="1600"/>
+              <a:rPr sz="1600">
+                <a:latin typeface="Calibri"/>
+              </a:rPr>
               <a:t>How Random Forests work - bootstrap + feature subsampling</a:t>
             </a:r>
           </a:p>
           <a:p>
             <a:r>
-              <a:rPr sz="1600"/>
+              <a:rPr sz="1600">
+                <a:latin typeface="Calibri"/>
+              </a:rPr>
               <a:t>Single tree vs forest - why ensembles win</a:t>
             </a:r>
           </a:p>
           <a:p>
             <a:r>
-              <a:rPr sz="1600"/>
+              <a:rPr sz="1600">
+                <a:latin typeface="Calibri"/>
+              </a:rPr>
               <a:t>The malware classifier - PE file features</a:t>
             </a:r>
           </a:p>
           <a:p>
             <a:r>
-              <a:rPr sz="1600"/>
+              <a:rPr sz="1600">
+                <a:latin typeface="Calibri"/>
+              </a:rPr>
               <a:t>OOB error, learning curves, and tuning</a:t>
             </a:r>
           </a:p>
@@ -9082,6 +9192,9 @@
           <a:lstStyle/>
           <a:p>
             <a:r>
+              <a:rPr b="1">
+                <a:latin typeface="Calibri"/>
+              </a:rPr>
               <a:t>What We'll Cover</a:t>
             </a:r>
           </a:p>
@@ -9121,11 +9234,17 @@
           <a:lstStyle/>
           <a:p>
             <a:r>
+              <a:rPr b="1">
+                <a:latin typeface="Calibri"/>
+              </a:rPr>
               <a:t>From One Tree</a:t>
             </a:r>
           </a:p>
           <a:p>
             <a:r>
+              <a:rPr b="1">
+                <a:latin typeface="Calibri"/>
+              </a:rPr>
               <a:t>to Many</a:t>
             </a:r>
           </a:p>
@@ -9147,6 +9266,9 @@
           <a:lstStyle/>
           <a:p>
             <a:r>
+              <a:rPr b="1">
+                <a:latin typeface="Calibri"/>
+              </a:rPr>
               <a:t>01</a:t>
             </a:r>
           </a:p>
@@ -9186,6 +9308,9 @@
           <a:lstStyle/>
           <a:p>
             <a:r>
+              <a:rPr b="1">
+                <a:latin typeface="Calibri"/>
+              </a:rPr>
               <a:t>Random Forest: Train Many Trees, Take a Vote</a:t>
             </a:r>
           </a:p>
@@ -9249,6 +9374,9 @@
           <a:lstStyle/>
           <a:p>
             <a:r>
+              <a:rPr>
+                <a:latin typeface="Calibri"/>
+              </a:rPr>
               <a:t/>
             </a:r>
           </a:p>
@@ -9270,37 +9398,49 @@
           <a:lstStyle/>
           <a:p>
             <a:r>
-              <a:rPr sz="1400"/>
+              <a:rPr sz="1400">
+                <a:latin typeface="Calibri"/>
+              </a:rPr>
               <a:t>A single tree is one analyst.</a:t>
             </a:r>
           </a:p>
           <a:p>
             <a:r>
-              <a:rPr sz="1400"/>
+              <a:rPr sz="1400">
+                <a:latin typeface="Calibri"/>
+              </a:rPr>
               <a:t>A Random Forest is 100 analysts</a:t>
             </a:r>
           </a:p>
           <a:p>
             <a:r>
-              <a:rPr sz="1400"/>
+              <a:rPr sz="1400">
+                <a:latin typeface="Calibri"/>
+              </a:rPr>
               <a:t>voting.</a:t>
             </a:r>
           </a:p>
           <a:p>
             <a:r>
-              <a:rPr sz="1400"/>
+              <a:rPr sz="1400">
+                <a:latin typeface="Calibri"/>
+              </a:rPr>
               <a:t/>
             </a:r>
           </a:p>
           <a:p>
             <a:r>
-              <a:rPr sz="1400"/>
+              <a:rPr sz="1400">
+                <a:latin typeface="Calibri"/>
+              </a:rPr>
               <a:t>The crowd averages out</a:t>
             </a:r>
           </a:p>
           <a:p>
             <a:r>
-              <a:rPr sz="1400"/>
+              <a:rPr sz="1400">
+                <a:latin typeface="Calibri"/>
+              </a:rPr>
               <a:t>individual mistakes.</a:t>
             </a:r>
           </a:p>
@@ -9322,6 +9462,9 @@
           <a:lstStyle/>
           <a:p>
             <a:r>
+              <a:rPr b="1">
+                <a:latin typeface="Calibri"/>
+              </a:rPr>
               <a:t>The Two Sources of Randomness</a:t>
             </a:r>
           </a:p>
@@ -9343,61 +9486,81 @@
           <a:lstStyle/>
           <a:p>
             <a:r>
-              <a:rPr sz="1400"/>
+              <a:rPr sz="1400">
+                <a:latin typeface="Calibri"/>
+              </a:rPr>
               <a:t>1. Bootstrap sampling</a:t>
             </a:r>
           </a:p>
           <a:p>
             <a:r>
-              <a:rPr sz="1400"/>
+              <a:rPr sz="1400">
+                <a:latin typeface="Calibri"/>
+              </a:rPr>
               <a:t>   Each tree sees a random 63% of data</a:t>
             </a:r>
           </a:p>
           <a:p>
             <a:r>
-              <a:rPr sz="1400"/>
+              <a:rPr sz="1400">
+                <a:latin typeface="Calibri"/>
+              </a:rPr>
               <a:t>   (sampling with replacement)</a:t>
             </a:r>
           </a:p>
           <a:p>
             <a:r>
-              <a:rPr sz="1400"/>
+              <a:rPr sz="1400">
+                <a:latin typeface="Calibri"/>
+              </a:rPr>
               <a:t/>
             </a:r>
           </a:p>
           <a:p>
             <a:r>
-              <a:rPr sz="1400"/>
+              <a:rPr sz="1400">
+                <a:latin typeface="Calibri"/>
+              </a:rPr>
               <a:t>2. Random feature subsets</a:t>
             </a:r>
           </a:p>
           <a:p>
             <a:r>
-              <a:rPr sz="1400"/>
+              <a:rPr sz="1400">
+                <a:latin typeface="Calibri"/>
+              </a:rPr>
               <a:t>   At each split, only sqrt(n) features</a:t>
             </a:r>
           </a:p>
           <a:p>
             <a:r>
-              <a:rPr sz="1400"/>
+              <a:rPr sz="1400">
+                <a:latin typeface="Calibri"/>
+              </a:rPr>
               <a:t>   considered (not all of them)</a:t>
             </a:r>
           </a:p>
           <a:p>
             <a:r>
-              <a:rPr sz="1400"/>
+              <a:rPr sz="1400">
+                <a:latin typeface="Calibri"/>
+              </a:rPr>
               <a:t/>
             </a:r>
           </a:p>
           <a:p>
             <a:r>
-              <a:rPr sz="1400"/>
+              <a:rPr sz="1400">
+                <a:latin typeface="Calibri"/>
+              </a:rPr>
               <a:t>Result: diverse trees that make</a:t>
             </a:r>
           </a:p>
           <a:p>
             <a:r>
-              <a:rPr sz="1400"/>
+              <a:rPr sz="1400">
+                <a:latin typeface="Calibri"/>
+              </a:rPr>
               <a:t>different mistakes</a:t>
             </a:r>
           </a:p>
@@ -9437,11 +9600,17 @@
           <a:lstStyle/>
           <a:p>
             <a:r>
+              <a:rPr b="1">
+                <a:latin typeface="Calibri"/>
+              </a:rPr>
               <a:t>Single Tree</a:t>
             </a:r>
           </a:p>
           <a:p>
             <a:r>
+              <a:rPr b="1">
+                <a:latin typeface="Calibri"/>
+              </a:rPr>
               <a:t>vs Forest</a:t>
             </a:r>
           </a:p>
@@ -9463,6 +9632,9 @@
           <a:lstStyle/>
           <a:p>
             <a:r>
+              <a:rPr b="1">
+                <a:latin typeface="Calibri"/>
+              </a:rPr>
               <a:t>02</a:t>
             </a:r>
           </a:p>
@@ -9502,6 +9674,9 @@
           <a:lstStyle/>
           <a:p>
             <a:r>
+              <a:rPr b="1">
+                <a:latin typeface="Calibri"/>
+              </a:rPr>
               <a:t>Why Ensembles Beat Individual Trees</a:t>
             </a:r>
           </a:p>
@@ -9565,11 +9740,17 @@
           <a:lstStyle/>
           <a:p>
             <a:r>
+              <a:rPr b="1">
+                <a:latin typeface="Calibri"/>
+              </a:rPr>
               <a:t>The Malware</a:t>
             </a:r>
           </a:p>
           <a:p>
             <a:r>
+              <a:rPr b="1">
+                <a:latin typeface="Calibri"/>
+              </a:rPr>
               <a:t>Classifier</a:t>
             </a:r>
           </a:p>
@@ -9591,6 +9772,9 @@
           <a:lstStyle/>
           <a:p>
             <a:r>
+              <a:rPr b="1">
+                <a:latin typeface="Calibri"/>
+              </a:rPr>
               <a:t>03</a:t>
             </a:r>
           </a:p>
@@ -9630,6 +9814,9 @@
           <a:lstStyle/>
           <a:p>
             <a:r>
+              <a:rPr b="1">
+                <a:latin typeface="Calibri"/>
+              </a:rPr>
               <a:t>PE File Feature Importance - What Matters Most?</a:t>
             </a:r>
           </a:p>
